--- a/coastal-16-testimonial.pptx
+++ b/coastal-16-testimonial.pptx
@@ -3316,7 +3316,7 @@
         </p:nvSpPr>
         <p:spPr>
           <a:xfrm>
-            <a:off x="3797350" y="8138220"/>
+            <a:off x="3480048" y="8233470"/>
             <a:ext cx="476250" cy="7144"/>
           </a:xfrm>
           <a:prstGeom prst="rect">
@@ -3360,7 +3360,7 @@
         </p:nvSpPr>
         <p:spPr>
           <a:xfrm>
-            <a:off x="6013252" y="8138220"/>
+            <a:off x="6330702" y="8233470"/>
             <a:ext cx="476250" cy="7144"/>
           </a:xfrm>
           <a:prstGeom prst="rect">
@@ -3404,8 +3404,8 @@
         </p:nvSpPr>
         <p:spPr>
           <a:xfrm>
-            <a:off x="762000" y="15840075"/>
-            <a:ext cx="3022997" cy="9525"/>
+            <a:off x="762000" y="15621000"/>
+            <a:ext cx="4189363" cy="9525"/>
           </a:xfrm>
           <a:prstGeom prst="rect">
             <a:avLst/>
@@ -3449,7 +3449,7 @@
         <p:spPr>
           <a:xfrm>
             <a:off x="762000" y="16373475"/>
-            <a:ext cx="3022997" cy="9525"/>
+            <a:ext cx="4189363" cy="9525"/>
           </a:xfrm>
           <a:prstGeom prst="rect">
             <a:avLst/>
@@ -3492,8 +3492,8 @@
         </p:nvSpPr>
         <p:spPr>
           <a:xfrm>
-            <a:off x="762000" y="15840075"/>
-            <a:ext cx="9525" cy="542925"/>
+            <a:off x="762000" y="15621000"/>
+            <a:ext cx="9525" cy="762000"/>
           </a:xfrm>
           <a:prstGeom prst="rect">
             <a:avLst/>
@@ -3536,8 +3536,8 @@
         </p:nvSpPr>
         <p:spPr>
           <a:xfrm>
-            <a:off x="3775472" y="15840075"/>
-            <a:ext cx="9525" cy="542925"/>
+            <a:off x="4941838" y="15621000"/>
+            <a:ext cx="9525" cy="762000"/>
           </a:xfrm>
           <a:prstGeom prst="rect">
             <a:avLst/>
@@ -3580,7 +3580,7 @@
         </p:nvSpPr>
         <p:spPr>
           <a:xfrm>
-            <a:off x="1041493" y="16057656"/>
+            <a:off x="1079593" y="15948118"/>
             <a:ext cx="107763" cy="107763"/>
           </a:xfrm>
           <a:prstGeom prst="rect">
@@ -3663,8 +3663,8 @@
         </p:nvSpPr>
         <p:spPr>
           <a:xfrm>
-            <a:off x="7670602" y="938212"/>
-            <a:ext cx="3348038" cy="104775"/>
+            <a:off x="6625084" y="904875"/>
+            <a:ext cx="5020866" cy="171450"/>
           </a:xfrm>
           <a:prstGeom prst="rect">
             <a:avLst/>
@@ -3677,7 +3677,7 @@
           <a:p>
             <a:pPr algn="l"/>
             <a:r>
-              <a:rPr sz="750" i="0" b="1" spc="240">
+              <a:rPr sz="1200" i="0" b="1" spc="360">
                 <a:solidFill>
                   <a:srgbClr val="F3EEE7"/>
                 </a:solidFill>
@@ -3772,8 +3772,8 @@
         </p:nvSpPr>
         <p:spPr>
           <a:xfrm>
-            <a:off x="3835524" y="7960816"/>
-            <a:ext cx="2615803" cy="247650"/>
+            <a:off x="3327797" y="7960816"/>
+            <a:ext cx="3631406" cy="352425"/>
           </a:xfrm>
           <a:prstGeom prst="rect">
             <a:avLst/>
@@ -3786,7 +3786,7 @@
           <a:p>
             <a:pPr algn="ctr"/>
             <a:r>
-              <a:rPr sz="1650" i="1" b="0">
+              <a:rPr sz="2400" i="1" b="0">
                 <a:solidFill>
                   <a:srgbClr val="F3EEE7"/>
                 </a:solidFill>
@@ -3807,8 +3807,8 @@
         </p:nvSpPr>
         <p:spPr>
           <a:xfrm>
-            <a:off x="3835524" y="8208466"/>
-            <a:ext cx="2615803" cy="114300"/>
+            <a:off x="3327797" y="8351341"/>
+            <a:ext cx="3631406" cy="161925"/>
           </a:xfrm>
           <a:prstGeom prst="rect">
             <a:avLst/>
@@ -3821,7 +3821,7 @@
           <a:p>
             <a:pPr algn="ctr"/>
             <a:r>
-              <a:rPr sz="825" i="0" b="0" spc="165">
+              <a:rPr sz="1125" i="0" b="0" spc="202">
                 <a:solidFill>
                   <a:srgbClr val="F3EEE7"/>
                 </a:solidFill>
@@ -3842,8 +3842,8 @@
         </p:nvSpPr>
         <p:spPr>
           <a:xfrm>
-            <a:off x="1266825" y="16035338"/>
-            <a:ext cx="3526155" cy="152400"/>
+            <a:off x="1323975" y="15878175"/>
+            <a:ext cx="5209461" cy="247650"/>
           </a:xfrm>
           <a:prstGeom prst="rect">
             <a:avLst/>
@@ -3856,7 +3856,7 @@
           <a:p>
             <a:pPr algn="l"/>
             <a:r>
-              <a:rPr sz="1050" i="0" b="1" spc="231">
+              <a:rPr sz="1650" i="0" b="1" spc="330">
                 <a:solidFill>
                   <a:srgbClr val="F3EEE7"/>
                 </a:solidFill>
@@ -3877,7 +3877,7 @@
         </p:nvSpPr>
         <p:spPr>
           <a:xfrm>
-            <a:off x="3365897" y="16021050"/>
+            <a:off x="4494163" y="15911512"/>
             <a:ext cx="579120" cy="180975"/>
           </a:xfrm>
           <a:prstGeom prst="rect">
@@ -3912,8 +3912,8 @@
         </p:nvSpPr>
         <p:spPr>
           <a:xfrm>
-            <a:off x="-2057400" y="17306925"/>
-            <a:ext cx="14401800" cy="123825"/>
+            <a:off x="-2057400" y="17249775"/>
+            <a:ext cx="14401800" cy="180975"/>
           </a:xfrm>
           <a:prstGeom prst="rect">
             <a:avLst/>
@@ -3926,7 +3926,7 @@
           <a:p>
             <a:pPr algn="ctr"/>
             <a:r>
-              <a:rPr sz="825" i="0" b="1" spc="264">
+              <a:rPr sz="1200" i="0" b="1" spc="360">
                 <a:solidFill>
                   <a:srgbClr val="F3EEE7"/>
                 </a:solidFill>

--- a/coastal-16-testimonial.pptx
+++ b/coastal-16-testimonial.pptx
@@ -3316,7 +3316,7 @@
         </p:nvSpPr>
         <p:spPr>
           <a:xfrm>
-            <a:off x="3480048" y="8233470"/>
+            <a:off x="3480048" y="8266807"/>
             <a:ext cx="476250" cy="7144"/>
           </a:xfrm>
           <a:prstGeom prst="rect">
@@ -3360,7 +3360,7 @@
         </p:nvSpPr>
         <p:spPr>
           <a:xfrm>
-            <a:off x="6330702" y="8233470"/>
+            <a:off x="6330702" y="8266807"/>
             <a:ext cx="476250" cy="7144"/>
           </a:xfrm>
           <a:prstGeom prst="rect">
@@ -3404,8 +3404,8 @@
         </p:nvSpPr>
         <p:spPr>
           <a:xfrm>
-            <a:off x="762000" y="15621000"/>
-            <a:ext cx="4189363" cy="9525"/>
+            <a:off x="762000" y="15516225"/>
+            <a:ext cx="4959251" cy="9525"/>
           </a:xfrm>
           <a:prstGeom prst="rect">
             <a:avLst/>
@@ -3449,7 +3449,7 @@
         <p:spPr>
           <a:xfrm>
             <a:off x="762000" y="16373475"/>
-            <a:ext cx="4189363" cy="9525"/>
+            <a:ext cx="4959251" cy="9525"/>
           </a:xfrm>
           <a:prstGeom prst="rect">
             <a:avLst/>
@@ -3492,8 +3492,8 @@
         </p:nvSpPr>
         <p:spPr>
           <a:xfrm>
-            <a:off x="762000" y="15621000"/>
-            <a:ext cx="9525" cy="762000"/>
+            <a:off x="762000" y="15516225"/>
+            <a:ext cx="9525" cy="866775"/>
           </a:xfrm>
           <a:prstGeom prst="rect">
             <a:avLst/>
@@ -3536,8 +3536,8 @@
         </p:nvSpPr>
         <p:spPr>
           <a:xfrm>
-            <a:off x="4941838" y="15621000"/>
-            <a:ext cx="9525" cy="762000"/>
+            <a:off x="5711726" y="15516225"/>
+            <a:ext cx="9525" cy="866775"/>
           </a:xfrm>
           <a:prstGeom prst="rect">
             <a:avLst/>
@@ -3580,7 +3580,7 @@
         </p:nvSpPr>
         <p:spPr>
           <a:xfrm>
-            <a:off x="1079593" y="15948118"/>
+            <a:off x="1117693" y="15895731"/>
             <a:ext cx="107763" cy="107763"/>
           </a:xfrm>
           <a:prstGeom prst="rect">
@@ -3663,8 +3663,8 @@
         </p:nvSpPr>
         <p:spPr>
           <a:xfrm>
-            <a:off x="6625084" y="904875"/>
-            <a:ext cx="5020866" cy="171450"/>
+            <a:off x="6240661" y="885825"/>
+            <a:ext cx="5635942" cy="209550"/>
           </a:xfrm>
           <a:prstGeom prst="rect">
             <a:avLst/>
@@ -3677,7 +3677,7 @@
           <a:p>
             <a:pPr algn="l"/>
             <a:r>
-              <a:rPr sz="1200" i="0" b="1" spc="360">
+              <a:rPr sz="1425" i="0" b="1" spc="370">
                 <a:solidFill>
                   <a:srgbClr val="F3EEE7"/>
                 </a:solidFill>
@@ -3807,8 +3807,8 @@
         </p:nvSpPr>
         <p:spPr>
           <a:xfrm>
-            <a:off x="3327797" y="8351341"/>
-            <a:ext cx="3631406" cy="161925"/>
+            <a:off x="3327797" y="8370391"/>
+            <a:ext cx="3631406" cy="209550"/>
           </a:xfrm>
           <a:prstGeom prst="rect">
             <a:avLst/>
@@ -3821,7 +3821,7 @@
           <a:p>
             <a:pPr algn="ctr"/>
             <a:r>
-              <a:rPr sz="1125" i="0" b="0" spc="202">
+              <a:rPr sz="1425" i="0" b="0" spc="228">
                 <a:solidFill>
                   <a:srgbClr val="F3EEE7"/>
                 </a:solidFill>
@@ -3842,8 +3842,8 @@
         </p:nvSpPr>
         <p:spPr>
           <a:xfrm>
-            <a:off x="1323975" y="15878175"/>
-            <a:ext cx="5209461" cy="247650"/>
+            <a:off x="1362075" y="15801975"/>
+            <a:ext cx="6166961" cy="295275"/>
           </a:xfrm>
           <a:prstGeom prst="rect">
             <a:avLst/>
@@ -3856,7 +3856,7 @@
           <a:p>
             <a:pPr algn="l"/>
             <a:r>
-              <a:rPr sz="1650" i="0" b="1" spc="330">
+              <a:rPr sz="2025" i="0" b="1" spc="364">
                 <a:solidFill>
                   <a:srgbClr val="F3EEE7"/>
                 </a:solidFill>
@@ -3877,8 +3877,8 @@
         </p:nvSpPr>
         <p:spPr>
           <a:xfrm>
-            <a:off x="4494163" y="15911512"/>
-            <a:ext cx="579120" cy="180975"/>
+            <a:off x="5130701" y="15792450"/>
+            <a:ext cx="731520" cy="314325"/>
           </a:xfrm>
           <a:prstGeom prst="rect">
             <a:avLst/>
@@ -3891,7 +3891,7 @@
           <a:p>
             <a:pPr algn="l"/>
             <a:r>
-              <a:rPr sz="1200" i="0" b="0">
+              <a:rPr sz="2100" i="0" b="0">
                 <a:solidFill>
                   <a:srgbClr val="A98BA6"/>
                 </a:solidFill>
@@ -3912,8 +3912,8 @@
         </p:nvSpPr>
         <p:spPr>
           <a:xfrm>
-            <a:off x="-2057400" y="17249775"/>
-            <a:ext cx="14401800" cy="180975"/>
+            <a:off x="-2057400" y="17211675"/>
+            <a:ext cx="14401800" cy="219075"/>
           </a:xfrm>
           <a:prstGeom prst="rect">
             <a:avLst/>
@@ -3926,7 +3926,7 @@
           <a:p>
             <a:pPr algn="ctr"/>
             <a:r>
-              <a:rPr sz="1200" i="0" b="1" spc="360">
+              <a:rPr sz="1425" i="0" b="1" spc="370">
                 <a:solidFill>
                   <a:srgbClr val="F3EEE7"/>
                 </a:solidFill>
